--- a/docs/test/stress/m3_challenger_stress.pptx
+++ b/docs/test/stress/m3_challenger_stress.pptx
@@ -8939,6 +8939,183 @@
             <a:avLst/>
           </a:prstGeom>
           <a:solidFill>
+            <a:srgbClr val="93B3A0"/>
+          </a:solidFill>
+          <a:ln/>
+        </p:spPr>
+      </p:sp>
+      <p:sp>
+        <p:nvSpPr>
+          <p:cNvPr id="7" name="Text 5"/>
+          <p:cNvSpPr/>
+          <p:nvPr/>
+        </p:nvSpPr>
+        <p:spPr>
+          <a:xfrm>
+            <a:off x="749808" y="1645920"/>
+            <a:ext cx="548640" cy="137160"/>
+          </a:xfrm>
+          <a:prstGeom prst="rect">
+            <a:avLst/>
+          </a:prstGeom>
+          <a:noFill/>
+          <a:ln/>
+        </p:spPr>
+        <p:txBody>
+          <a:bodyPr wrap="square" rtlCol="0" anchor="ctr"/>
+          <a:lstStyle/>
+          <a:p>
+            <a:pPr indent="0" marL="0">
+              <a:buNone/>
+            </a:pPr>
+            <a:r>
+              <a:rPr lang="en-US" sz="900" dirty="0">
+                <a:solidFill>
+                  <a:srgbClr val="5B6B73"/>
+                </a:solidFill>
+                <a:latin typeface="맑은 고딕" pitchFamily="34" charset="0"/>
+                <a:ea typeface="맑은 고딕" pitchFamily="34" charset="-122"/>
+                <a:cs typeface="맑은 고딕" pitchFamily="34" charset="-120"/>
+              </a:rPr>
+              <a:t>2026</a:t>
+            </a:r>
+            <a:endParaRPr lang="en-US" sz="900" dirty="0"/>
+          </a:p>
+        </p:txBody>
+      </p:sp>
+      <p:sp>
+        <p:nvSpPr>
+          <p:cNvPr id="8" name="Shape 6"/>
+          <p:cNvSpPr/>
+          <p:nvPr/>
+        </p:nvSpPr>
+        <p:spPr>
+          <a:xfrm>
+            <a:off x="1298448" y="1645920"/>
+            <a:ext cx="137160" cy="137160"/>
+          </a:xfrm>
+          <a:prstGeom prst="rect">
+            <a:avLst/>
+          </a:prstGeom>
+          <a:solidFill>
+            <a:srgbClr val="A6C1D9"/>
+          </a:solidFill>
+          <a:ln/>
+        </p:spPr>
+      </p:sp>
+      <p:sp>
+        <p:nvSpPr>
+          <p:cNvPr id="9" name="Text 7"/>
+          <p:cNvSpPr/>
+          <p:nvPr/>
+        </p:nvSpPr>
+        <p:spPr>
+          <a:xfrm>
+            <a:off x="1481328" y="1645920"/>
+            <a:ext cx="548640" cy="137160"/>
+          </a:xfrm>
+          <a:prstGeom prst="rect">
+            <a:avLst/>
+          </a:prstGeom>
+          <a:noFill/>
+          <a:ln/>
+        </p:spPr>
+        <p:txBody>
+          <a:bodyPr wrap="square" rtlCol="0" anchor="ctr"/>
+          <a:lstStyle/>
+          <a:p>
+            <a:pPr indent="0" marL="0">
+              <a:buNone/>
+            </a:pPr>
+            <a:r>
+              <a:rPr lang="en-US" sz="900" dirty="0">
+                <a:solidFill>
+                  <a:srgbClr val="5B6B73"/>
+                </a:solidFill>
+                <a:latin typeface="맑은 고딕" pitchFamily="34" charset="0"/>
+                <a:ea typeface="맑은 고딕" pitchFamily="34" charset="-122"/>
+                <a:cs typeface="맑은 고딕" pitchFamily="34" charset="-120"/>
+              </a:rPr>
+              <a:t>2027</a:t>
+            </a:r>
+            <a:endParaRPr lang="en-US" sz="900" dirty="0"/>
+          </a:p>
+        </p:txBody>
+      </p:sp>
+      <p:sp>
+        <p:nvSpPr>
+          <p:cNvPr id="10" name="Shape 8"/>
+          <p:cNvSpPr/>
+          <p:nvPr/>
+        </p:nvSpPr>
+        <p:spPr>
+          <a:xfrm>
+            <a:off x="2029968" y="1645920"/>
+            <a:ext cx="137160" cy="137160"/>
+          </a:xfrm>
+          <a:prstGeom prst="rect">
+            <a:avLst/>
+          </a:prstGeom>
+          <a:solidFill>
+            <a:srgbClr val="E8D1A7"/>
+          </a:solidFill>
+          <a:ln/>
+        </p:spPr>
+      </p:sp>
+      <p:sp>
+        <p:nvSpPr>
+          <p:cNvPr id="11" name="Text 9"/>
+          <p:cNvSpPr/>
+          <p:nvPr/>
+        </p:nvSpPr>
+        <p:spPr>
+          <a:xfrm>
+            <a:off x="2212848" y="1645920"/>
+            <a:ext cx="548640" cy="137160"/>
+          </a:xfrm>
+          <a:prstGeom prst="rect">
+            <a:avLst/>
+          </a:prstGeom>
+          <a:noFill/>
+          <a:ln/>
+        </p:spPr>
+        <p:txBody>
+          <a:bodyPr wrap="square" rtlCol="0" anchor="ctr"/>
+          <a:lstStyle/>
+          <a:p>
+            <a:pPr indent="0" marL="0">
+              <a:buNone/>
+            </a:pPr>
+            <a:r>
+              <a:rPr lang="en-US" sz="900" dirty="0">
+                <a:solidFill>
+                  <a:srgbClr val="5B6B73"/>
+                </a:solidFill>
+                <a:latin typeface="맑은 고딕" pitchFamily="34" charset="0"/>
+                <a:ea typeface="맑은 고딕" pitchFamily="34" charset="-122"/>
+                <a:cs typeface="맑은 고딕" pitchFamily="34" charset="-120"/>
+              </a:rPr>
+              <a:t>2030</a:t>
+            </a:r>
+            <a:endParaRPr lang="en-US" sz="900" dirty="0"/>
+          </a:p>
+        </p:txBody>
+      </p:sp>
+      <p:sp>
+        <p:nvSpPr>
+          <p:cNvPr id="12" name="Shape 10"/>
+          <p:cNvSpPr/>
+          <p:nvPr/>
+        </p:nvSpPr>
+        <p:spPr>
+          <a:xfrm>
+            <a:off x="2761488" y="1645920"/>
+            <a:ext cx="137160" cy="137160"/>
+          </a:xfrm>
+          <a:prstGeom prst="rect">
+            <a:avLst/>
+          </a:prstGeom>
+          <a:solidFill>
             <a:srgbClr val="FBEFE8"/>
           </a:solidFill>
           <a:ln w="12700">
@@ -8951,13 +9128,13 @@
       </p:sp>
       <p:sp>
         <p:nvSpPr>
-          <p:cNvPr id="7" name="Text 5"/>
+          <p:cNvPr id="13" name="Text 11"/>
           <p:cNvSpPr/>
           <p:nvPr/>
         </p:nvSpPr>
         <p:spPr>
           <a:xfrm>
-            <a:off x="749808" y="1645920"/>
+            <a:off x="2944368" y="1645920"/>
             <a:ext cx="548640" cy="137160"/>
           </a:xfrm>
           <a:prstGeom prst="rect">
@@ -8990,7 +9167,7 @@
       </p:sp>
       <p:sp>
         <p:nvSpPr>
-          <p:cNvPr id="8" name="Text 6"/>
+          <p:cNvPr id="14" name="Text 12"/>
           <p:cNvSpPr/>
           <p:nvPr/>
         </p:nvSpPr>
@@ -9029,20 +9206,20 @@
       </p:sp>
       <p:sp>
         <p:nvSpPr>
-          <p:cNvPr id="9" name="Shape 7"/>
+          <p:cNvPr id="15" name="Shape 13"/>
           <p:cNvSpPr/>
           <p:nvPr/>
         </p:nvSpPr>
         <p:spPr>
           <a:xfrm>
-            <a:off x="1591056" y="4721352"/>
-            <a:ext cx="1481328" cy="1286256"/>
+            <a:off x="1504645" y="4721352"/>
+            <a:ext cx="1654150" cy="1286256"/>
           </a:xfrm>
           <a:prstGeom prst="rect">
             <a:avLst/>
           </a:prstGeom>
           <a:solidFill>
-            <a:srgbClr val="E2E8F0"/>
+            <a:srgbClr val="E8D1A7"/>
           </a:solidFill>
           <a:ln w="13970">
             <a:solidFill>
@@ -9054,14 +9231,14 @@
       </p:sp>
       <p:sp>
         <p:nvSpPr>
-          <p:cNvPr id="10" name="Text 8"/>
+          <p:cNvPr id="16" name="Text 14"/>
           <p:cNvSpPr/>
           <p:nvPr/>
         </p:nvSpPr>
         <p:spPr>
           <a:xfrm>
-            <a:off x="1627632" y="4712208"/>
-            <a:ext cx="1408176" cy="1304544"/>
+            <a:off x="1541221" y="4712208"/>
+            <a:ext cx="1580998" cy="1304544"/>
           </a:xfrm>
           <a:prstGeom prst="rect">
             <a:avLst/>
@@ -9070,7 +9247,9 @@
           <a:ln/>
         </p:spPr>
         <p:txBody>
-          <a:bodyPr wrap="square" rtlCol="0" anchor="ctr"/>
+          <a:bodyPr wrap="square" rtlCol="0" anchor="ctr">
+            <a:normAutofit/>
+          </a:bodyPr>
           <a:lstStyle/>
           <a:p>
             <a:pPr algn="ctr" indent="0" marL="0">
@@ -9085,7 +9264,7 @@
                 <a:ea typeface="맑은 고딕" pitchFamily="34" charset="-122"/>
                 <a:cs typeface="맑은 고딕" pitchFamily="34" charset="-120"/>
               </a:rPr>
-              <a:t>100 (18평)</a:t>
+              <a:t>스타벅스 (30평)</a:t>
             </a:r>
             <a:endParaRPr lang="en-US" sz="1000" dirty="0"/>
           </a:p>
@@ -9093,7 +9272,7 @@
       </p:sp>
       <p:sp>
         <p:nvSpPr>
-          <p:cNvPr id="11" name="Text 9"/>
+          <p:cNvPr id="17" name="Text 15"/>
           <p:cNvSpPr/>
           <p:nvPr/>
         </p:nvSpPr>
@@ -9132,20 +9311,20 @@
       </p:sp>
       <p:sp>
         <p:nvSpPr>
-          <p:cNvPr id="12" name="Shape 10"/>
+          <p:cNvPr id="18" name="Shape 16"/>
           <p:cNvSpPr/>
           <p:nvPr/>
         </p:nvSpPr>
         <p:spPr>
           <a:xfrm>
-            <a:off x="1714500" y="3380232"/>
-            <a:ext cx="1234440" cy="1286256"/>
+            <a:off x="1591056" y="3380232"/>
+            <a:ext cx="1481328" cy="1286256"/>
           </a:xfrm>
           <a:prstGeom prst="rect">
             <a:avLst/>
           </a:prstGeom>
           <a:solidFill>
-            <a:srgbClr val="E2E8F0"/>
+            <a:srgbClr val="A6C1D9"/>
           </a:solidFill>
           <a:ln w="13970">
             <a:solidFill>
@@ -9157,14 +9336,14 @@
       </p:sp>
       <p:sp>
         <p:nvSpPr>
-          <p:cNvPr id="13" name="Text 11"/>
+          <p:cNvPr id="19" name="Text 17"/>
           <p:cNvSpPr/>
           <p:nvPr/>
         </p:nvSpPr>
         <p:spPr>
           <a:xfrm>
-            <a:off x="1751076" y="3371088"/>
-            <a:ext cx="1161288" cy="1304544"/>
+            <a:off x="1627632" y="3371088"/>
+            <a:ext cx="1408176" cy="1304544"/>
           </a:xfrm>
           <a:prstGeom prst="rect">
             <a:avLst/>
@@ -9173,7 +9352,9 @@
           <a:ln/>
         </p:spPr>
         <p:txBody>
-          <a:bodyPr wrap="square" rtlCol="0" anchor="ctr"/>
+          <a:bodyPr wrap="square" rtlCol="0" anchor="ctr">
+            <a:normAutofit/>
+          </a:bodyPr>
           <a:lstStyle/>
           <a:p>
             <a:pPr algn="ctr" indent="0" marL="0">
@@ -9188,7 +9369,7 @@
                 <a:ea typeface="맑은 고딕" pitchFamily="34" charset="-122"/>
                 <a:cs typeface="맑은 고딕" pitchFamily="34" charset="-120"/>
               </a:rPr>
-              <a:t>90 (15평)</a:t>
+              <a:t>투썸플레이스 (27평)</a:t>
             </a:r>
             <a:endParaRPr lang="en-US" sz="1000" dirty="0"/>
           </a:p>
@@ -9196,7 +9377,7 @@
       </p:sp>
       <p:sp>
         <p:nvSpPr>
-          <p:cNvPr id="14" name="Text 12"/>
+          <p:cNvPr id="20" name="Text 18"/>
           <p:cNvSpPr/>
           <p:nvPr/>
         </p:nvSpPr>
@@ -9235,7 +9416,7 @@
       </p:sp>
       <p:sp>
         <p:nvSpPr>
-          <p:cNvPr id="15" name="Shape 13"/>
+          <p:cNvPr id="21" name="Shape 19"/>
           <p:cNvSpPr/>
           <p:nvPr/>
         </p:nvSpPr>
@@ -9248,7 +9429,7 @@
             <a:avLst/>
           </a:prstGeom>
           <a:solidFill>
-            <a:srgbClr val="E2E8F0"/>
+            <a:srgbClr val="93B3A0"/>
           </a:solidFill>
           <a:ln w="13970">
             <a:solidFill>
@@ -9260,7 +9441,7 @@
       </p:sp>
       <p:sp>
         <p:nvSpPr>
-          <p:cNvPr id="16" name="Text 14"/>
+          <p:cNvPr id="22" name="Text 20"/>
           <p:cNvSpPr/>
           <p:nvPr/>
         </p:nvSpPr>
@@ -9276,7 +9457,9 @@
           <a:ln/>
         </p:spPr>
         <p:txBody>
-          <a:bodyPr wrap="square" rtlCol="0" anchor="ctr"/>
+          <a:bodyPr wrap="square" rtlCol="0" anchor="ctr">
+            <a:normAutofit/>
+          </a:bodyPr>
           <a:lstStyle/>
           <a:p>
             <a:pPr algn="ctr" indent="0" marL="0">
@@ -9291,7 +9474,7 @@
                 <a:ea typeface="맑은 고딕" pitchFamily="34" charset="-122"/>
                 <a:cs typeface="맑은 고딕" pitchFamily="34" charset="-120"/>
               </a:rPr>
-              <a:t>150 (30평)</a:t>
+              <a:t>한화생명 (45평)</a:t>
             </a:r>
             <a:endParaRPr lang="en-US" sz="1000" dirty="0"/>
           </a:p>
@@ -9299,7 +9482,7 @@
       </p:sp>
       <p:sp>
         <p:nvSpPr>
-          <p:cNvPr id="17" name="Text 15"/>
+          <p:cNvPr id="23" name="Text 21"/>
           <p:cNvSpPr/>
           <p:nvPr/>
         </p:nvSpPr>
@@ -12105,6 +12288,17 @@
                       <a:pPr algn="l" indent="0" marL="0">
                         <a:buNone/>
                       </a:pPr>
+                      <a:r>
+                        <a:rPr lang="en-US" sz="850" dirty="0">
+                          <a:solidFill>
+                            <a:srgbClr val="2B2B2B"/>
+                          </a:solidFill>
+                          <a:latin typeface="맑은 고딕" pitchFamily="34" charset="0"/>
+                          <a:ea typeface="맑은 고딕" pitchFamily="34" charset="-122"/>
+                          <a:cs typeface="맑은 고딕" pitchFamily="34" charset="-120"/>
+                        </a:rPr>
+                        <a:t>3개 호실</a:t>
+                      </a:r>
                       <a:endParaRPr lang="en-US" sz="850" dirty="0">
                         <a:latin typeface="맑은 고딕" charset="0"/>
                         <a:ea typeface="맑은 고딕" charset="0"/>
@@ -12162,6 +12356,17 @@
                       <a:pPr algn="ctr" indent="0" marL="0">
                         <a:buNone/>
                       </a:pPr>
+                      <a:r>
+                        <a:rPr lang="en-US" sz="850" dirty="0">
+                          <a:solidFill>
+                            <a:srgbClr val="2B2B2B"/>
+                          </a:solidFill>
+                          <a:latin typeface="맑은 고딕" pitchFamily="34" charset="0"/>
+                          <a:ea typeface="맑은 고딕" pitchFamily="34" charset="-122"/>
+                          <a:cs typeface="맑은 고딕" pitchFamily="34" charset="-120"/>
+                        </a:rPr>
+                        <a:t>-</a:t>
+                      </a:r>
                       <a:endParaRPr lang="en-US" sz="850" dirty="0">
                         <a:latin typeface="맑은 고딕" charset="0"/>
                         <a:ea typeface="맑은 고딕" charset="0"/>
@@ -12228,7 +12433,7 @@
                           <a:ea typeface="맑은 고딕" pitchFamily="34" charset="-122"/>
                           <a:cs typeface="맑은 고딕" pitchFamily="34" charset="-120"/>
                         </a:rPr>
-                        <a:t>3개 호실</a:t>
+                        <a:t>340.0</a:t>
                       </a:r>
                       <a:endParaRPr lang="en-US" sz="850" dirty="0">
                         <a:latin typeface="맑은 고딕" charset="0"/>
@@ -12364,7 +12569,7 @@
                           <a:ea typeface="맑은 고딕" pitchFamily="34" charset="-122"/>
                           <a:cs typeface="맑은 고딕" pitchFamily="34" charset="-120"/>
                         </a:rPr>
-                        <a:t>33000.0</a:t>
+                        <a:t>33,000</a:t>
                       </a:r>
                       <a:endParaRPr lang="en-US" sz="850" dirty="0">
                         <a:latin typeface="맑은 고딕" charset="0"/>
@@ -12432,7 +12637,7 @@
                           <a:ea typeface="맑은 고딕" pitchFamily="34" charset="-122"/>
                           <a:cs typeface="맑은 고딕" pitchFamily="34" charset="-120"/>
                         </a:rPr>
-                        <a:t>15714%</a:t>
+                        <a:t>2,600</a:t>
                       </a:r>
                       <a:endParaRPr lang="en-US" sz="850" dirty="0">
                         <a:latin typeface="맑은 고딕" charset="0"/>
@@ -12636,7 +12841,7 @@
                           <a:ea typeface="맑은 고딕" pitchFamily="34" charset="-122"/>
                           <a:cs typeface="맑은 고딕" pitchFamily="34" charset="-120"/>
                         </a:rPr>
-                        <a:t>608,326</a:t>
+                        <a:t>-</a:t>
                       </a:r>
                       <a:endParaRPr lang="en-US" sz="850" dirty="0">
                         <a:latin typeface="맑은 고딕" charset="0"/>
@@ -12694,7 +12899,7 @@
       </p:graphicFrame>
       <p:sp>
         <p:nvSpPr>
-          <p:cNvPr id="19" name="Text 16"/>
+          <p:cNvPr id="25" name="Text 22"/>
           <p:cNvSpPr/>
           <p:nvPr/>
         </p:nvSpPr>
@@ -12733,7 +12938,7 @@
       </p:sp>
       <p:sp>
         <p:nvSpPr>
-          <p:cNvPr id="20" name="Text 17"/>
+          <p:cNvPr id="26" name="Text 23"/>
           <p:cNvSpPr/>
           <p:nvPr/>
         </p:nvSpPr>

--- a/docs/test/stress/m3_challenger_stress.pptx
+++ b/docs/test/stress/m3_challenger_stress.pptx
@@ -8933,15 +8933,20 @@
         <p:spPr>
           <a:xfrm>
             <a:off x="566928" y="1645920"/>
-            <a:ext cx="137160" cy="137160"/>
+            <a:ext cx="2011680" cy="329184"/>
           </a:xfrm>
           <a:prstGeom prst="rect">
             <a:avLst/>
           </a:prstGeom>
           <a:solidFill>
-            <a:srgbClr val="93B3A0"/>
+            <a:srgbClr val="10161F"/>
           </a:solidFill>
-          <a:ln/>
+          <a:ln w="6350">
+            <a:solidFill>
+              <a:srgbClr val="10161F"/>
+            </a:solidFill>
+            <a:prstDash val="solid"/>
+          </a:ln>
         </p:spPr>
       </p:sp>
       <p:sp>
@@ -8952,8 +8957,8 @@
         </p:nvSpPr>
         <p:spPr>
           <a:xfrm>
-            <a:off x="749808" y="1645920"/>
-            <a:ext cx="548640" cy="137160"/>
+            <a:off x="566928" y="1645920"/>
+            <a:ext cx="2011680" cy="329184"/>
           </a:xfrm>
           <a:prstGeom prst="rect">
             <a:avLst/>
@@ -8962,22 +8967,22 @@
           <a:ln/>
         </p:spPr>
         <p:txBody>
-          <a:bodyPr wrap="square" rtlCol="0" anchor="ctr"/>
+          <a:bodyPr wrap="none" lIns="0" tIns="0" rIns="0" bIns="0" rtlCol="0" anchor="ctr"/>
           <a:lstStyle/>
           <a:p>
-            <a:pPr indent="0" marL="0">
+            <a:pPr algn="ctr" indent="0" marL="0">
               <a:buNone/>
             </a:pPr>
             <a:r>
-              <a:rPr lang="en-US" sz="900" dirty="0">
+              <a:rPr lang="en-US" sz="900" b="1" dirty="0">
                 <a:solidFill>
-                  <a:srgbClr val="5B6B73"/>
+                  <a:srgbClr val="FFFFFF"/>
                 </a:solidFill>
                 <a:latin typeface="맑은 고딕" pitchFamily="34" charset="0"/>
                 <a:ea typeface="맑은 고딕" pitchFamily="34" charset="-122"/>
                 <a:cs typeface="맑은 고딕" pitchFamily="34" charset="-120"/>
               </a:rPr>
-              <a:t>2026</a:t>
+              <a:t>층별 스태킹 플랜 (㎡)</a:t>
             </a:r>
             <a:endParaRPr lang="en-US" sz="900" dirty="0"/>
           </a:p>
@@ -8985,34 +8990,14 @@
       </p:sp>
       <p:sp>
         <p:nvSpPr>
-          <p:cNvPr id="8" name="Shape 6"/>
+          <p:cNvPr id="8" name="Text 6"/>
           <p:cNvSpPr/>
           <p:nvPr/>
         </p:nvSpPr>
         <p:spPr>
           <a:xfrm>
-            <a:off x="1298448" y="1645920"/>
-            <a:ext cx="137160" cy="137160"/>
-          </a:xfrm>
-          <a:prstGeom prst="rect">
-            <a:avLst/>
-          </a:prstGeom>
-          <a:solidFill>
-            <a:srgbClr val="A6C1D9"/>
-          </a:solidFill>
-          <a:ln/>
-        </p:spPr>
-      </p:sp>
-      <p:sp>
-        <p:nvSpPr>
-          <p:cNvPr id="9" name="Text 7"/>
-          <p:cNvSpPr/>
-          <p:nvPr/>
-        </p:nvSpPr>
-        <p:spPr>
-          <a:xfrm>
-            <a:off x="1481328" y="1645920"/>
-            <a:ext cx="548640" cy="137160"/>
+            <a:off x="566928" y="2633472"/>
+            <a:ext cx="475488" cy="329184"/>
           </a:xfrm>
           <a:prstGeom prst="rect">
             <a:avLst/>
@@ -9021,22 +9006,22 @@
           <a:ln/>
         </p:spPr>
         <p:txBody>
-          <a:bodyPr wrap="square" rtlCol="0" anchor="ctr"/>
+          <a:bodyPr wrap="none" lIns="0" tIns="0" rIns="0" bIns="0" rtlCol="0" anchor="ctr"/>
           <a:lstStyle/>
           <a:p>
-            <a:pPr indent="0" marL="0">
+            <a:pPr algn="r" indent="0" marL="0">
               <a:buNone/>
             </a:pPr>
             <a:r>
-              <a:rPr lang="en-US" sz="900" dirty="0">
+              <a:rPr lang="en-US" sz="900" b="1" dirty="0">
                 <a:solidFill>
-                  <a:srgbClr val="5B6B73"/>
+                  <a:srgbClr val="10161F"/>
                 </a:solidFill>
                 <a:latin typeface="맑은 고딕" pitchFamily="34" charset="0"/>
                 <a:ea typeface="맑은 고딕" pitchFamily="34" charset="-122"/>
                 <a:cs typeface="맑은 고딕" pitchFamily="34" charset="-120"/>
               </a:rPr>
-              <a:t>2027</a:t>
+              <a:t>1F</a:t>
             </a:r>
             <a:endParaRPr lang="en-US" sz="900" dirty="0"/>
           </a:p>
@@ -9044,14 +9029,14 @@
       </p:sp>
       <p:sp>
         <p:nvSpPr>
-          <p:cNvPr id="10" name="Shape 8"/>
+          <p:cNvPr id="9" name="Shape 7"/>
           <p:cNvSpPr/>
           <p:nvPr/>
         </p:nvSpPr>
         <p:spPr>
           <a:xfrm>
-            <a:off x="2029968" y="1645920"/>
-            <a:ext cx="137160" cy="137160"/>
+            <a:off x="1115568" y="2665476"/>
+            <a:ext cx="1444752" cy="265176"/>
           </a:xfrm>
           <a:prstGeom prst="rect">
             <a:avLst/>
@@ -9059,8 +9044,52 @@
           <a:solidFill>
             <a:srgbClr val="E8D1A7"/>
           </a:solidFill>
+          <a:ln w="9525">
+            <a:solidFill>
+              <a:srgbClr val="5B6B73"/>
+            </a:solidFill>
+            <a:prstDash val="solid"/>
+          </a:ln>
+        </p:spPr>
+      </p:sp>
+      <p:sp>
+        <p:nvSpPr>
+          <p:cNvPr id="10" name="Text 8"/>
+          <p:cNvSpPr/>
+          <p:nvPr/>
+        </p:nvSpPr>
+        <p:spPr>
+          <a:xfrm>
+            <a:off x="1143000" y="2665476"/>
+            <a:ext cx="1389888" cy="265176"/>
+          </a:xfrm>
+          <a:prstGeom prst="rect">
+            <a:avLst/>
+          </a:prstGeom>
+          <a:noFill/>
           <a:ln/>
         </p:spPr>
+        <p:txBody>
+          <a:bodyPr wrap="none" lIns="0" tIns="0" rIns="0" bIns="0" rtlCol="0" anchor="ctr"/>
+          <a:lstStyle/>
+          <a:p>
+            <a:pPr algn="ctr" indent="0" marL="0">
+              <a:buNone/>
+            </a:pPr>
+            <a:r>
+              <a:rPr lang="en-US" sz="800" dirty="0">
+                <a:solidFill>
+                  <a:srgbClr val="3A3A3A"/>
+                </a:solidFill>
+                <a:latin typeface="맑은 고딕" pitchFamily="34" charset="0"/>
+                <a:ea typeface="맑은 고딕" pitchFamily="34" charset="-122"/>
+                <a:cs typeface="맑은 고딕" pitchFamily="34" charset="-120"/>
+              </a:rPr>
+              <a:t>스타벅스 100㎡</a:t>
+            </a:r>
+            <a:endParaRPr lang="en-US" sz="800" dirty="0"/>
+          </a:p>
+        </p:txBody>
       </p:sp>
       <p:sp>
         <p:nvSpPr>
@@ -9070,8 +9099,8 @@
         </p:nvSpPr>
         <p:spPr>
           <a:xfrm>
-            <a:off x="2212848" y="1645920"/>
-            <a:ext cx="548640" cy="137160"/>
+            <a:off x="566928" y="2304288"/>
+            <a:ext cx="475488" cy="329184"/>
           </a:xfrm>
           <a:prstGeom prst="rect">
             <a:avLst/>
@@ -9080,22 +9109,22 @@
           <a:ln/>
         </p:spPr>
         <p:txBody>
-          <a:bodyPr wrap="square" rtlCol="0" anchor="ctr"/>
+          <a:bodyPr wrap="none" lIns="0" tIns="0" rIns="0" bIns="0" rtlCol="0" anchor="ctr"/>
           <a:lstStyle/>
           <a:p>
-            <a:pPr indent="0" marL="0">
+            <a:pPr algn="r" indent="0" marL="0">
               <a:buNone/>
             </a:pPr>
             <a:r>
-              <a:rPr lang="en-US" sz="900" dirty="0">
+              <a:rPr lang="en-US" sz="900" b="1" dirty="0">
                 <a:solidFill>
-                  <a:srgbClr val="5B6B73"/>
+                  <a:srgbClr val="10161F"/>
                 </a:solidFill>
                 <a:latin typeface="맑은 고딕" pitchFamily="34" charset="0"/>
                 <a:ea typeface="맑은 고딕" pitchFamily="34" charset="-122"/>
                 <a:cs typeface="맑은 고딕" pitchFamily="34" charset="-120"/>
               </a:rPr>
-              <a:t>2030</a:t>
+              <a:t>2F</a:t>
             </a:r>
             <a:endParaRPr lang="en-US" sz="900" dirty="0"/>
           </a:p>
@@ -9109,20 +9138,20 @@
         </p:nvSpPr>
         <p:spPr>
           <a:xfrm>
-            <a:off x="2761488" y="1645920"/>
-            <a:ext cx="137160" cy="137160"/>
+            <a:off x="1187806" y="2336292"/>
+            <a:ext cx="1300277" cy="265176"/>
           </a:xfrm>
           <a:prstGeom prst="rect">
             <a:avLst/>
           </a:prstGeom>
           <a:solidFill>
-            <a:srgbClr val="FBEFE8"/>
+            <a:srgbClr val="A6C1D9"/>
           </a:solidFill>
-          <a:ln w="12700">
+          <a:ln w="9525">
             <a:solidFill>
-              <a:srgbClr val="B05A2E"/>
+              <a:srgbClr val="5B6B73"/>
             </a:solidFill>
-            <a:prstDash val="dash"/>
+            <a:prstDash val="solid"/>
           </a:ln>
         </p:spPr>
       </p:sp>
@@ -9134,8 +9163,8 @@
         </p:nvSpPr>
         <p:spPr>
           <a:xfrm>
-            <a:off x="2944368" y="1645920"/>
-            <a:ext cx="548640" cy="137160"/>
+            <a:off x="1215238" y="2336292"/>
+            <a:ext cx="1245413" cy="265176"/>
           </a:xfrm>
           <a:prstGeom prst="rect">
             <a:avLst/>
@@ -9144,24 +9173,24 @@
           <a:ln/>
         </p:spPr>
         <p:txBody>
-          <a:bodyPr wrap="square" rtlCol="0" anchor="ctr"/>
+          <a:bodyPr wrap="none" lIns="0" tIns="0" rIns="0" bIns="0" rtlCol="0" anchor="ctr"/>
           <a:lstStyle/>
           <a:p>
-            <a:pPr indent="0" marL="0">
+            <a:pPr algn="ctr" indent="0" marL="0">
               <a:buNone/>
             </a:pPr>
             <a:r>
-              <a:rPr lang="en-US" sz="900" b="1" dirty="0">
+              <a:rPr lang="en-US" sz="800" dirty="0">
                 <a:solidFill>
-                  <a:srgbClr val="B05A2E"/>
+                  <a:srgbClr val="3A3A3A"/>
                 </a:solidFill>
                 <a:latin typeface="맑은 고딕" pitchFamily="34" charset="0"/>
                 <a:ea typeface="맑은 고딕" pitchFamily="34" charset="-122"/>
                 <a:cs typeface="맑은 고딕" pitchFamily="34" charset="-120"/>
               </a:rPr>
-              <a:t>공실</a:t>
+              <a:t>투썸플레이스 90㎡</a:t>
             </a:r>
-            <a:endParaRPr lang="en-US" sz="900" dirty="0"/>
+            <a:endParaRPr lang="en-US" sz="800" dirty="0"/>
           </a:p>
         </p:txBody>
       </p:sp>
@@ -9173,8 +9202,8 @@
         </p:nvSpPr>
         <p:spPr>
           <a:xfrm>
-            <a:off x="566928" y="4693920"/>
-            <a:ext cx="475488" cy="1341120"/>
+            <a:off x="566928" y="1975104"/>
+            <a:ext cx="475488" cy="329184"/>
           </a:xfrm>
           <a:prstGeom prst="rect">
             <a:avLst/>
@@ -9183,14 +9212,14 @@
           <a:ln/>
         </p:spPr>
         <p:txBody>
-          <a:bodyPr wrap="square" rtlCol="0" anchor="ctr"/>
+          <a:bodyPr wrap="none" lIns="0" tIns="0" rIns="0" bIns="0" rtlCol="0" anchor="ctr"/>
           <a:lstStyle/>
           <a:p>
             <a:pPr algn="r" indent="0" marL="0">
               <a:buNone/>
             </a:pPr>
             <a:r>
-              <a:rPr lang="en-US" sz="1200" b="1" dirty="0">
+              <a:rPr lang="en-US" sz="900" b="1" dirty="0">
                 <a:solidFill>
                   <a:srgbClr val="10161F"/>
                 </a:solidFill>
@@ -9198,9 +9227,9 @@
                 <a:ea typeface="맑은 고딕" pitchFamily="34" charset="-122"/>
                 <a:cs typeface="맑은 고딕" pitchFamily="34" charset="-120"/>
               </a:rPr>
-              <a:t>1F</a:t>
+              <a:t>3F</a:t>
             </a:r>
-            <a:endParaRPr lang="en-US" sz="1200" dirty="0"/>
+            <a:endParaRPr lang="en-US" sz="900" dirty="0"/>
           </a:p>
         </p:txBody>
       </p:sp>
@@ -9212,16 +9241,16 @@
         </p:nvSpPr>
         <p:spPr>
           <a:xfrm>
-            <a:off x="1504645" y="4721352"/>
-            <a:ext cx="1654150" cy="1286256"/>
+            <a:off x="1115568" y="2007108"/>
+            <a:ext cx="1444752" cy="265176"/>
           </a:xfrm>
           <a:prstGeom prst="rect">
             <a:avLst/>
           </a:prstGeom>
           <a:solidFill>
-            <a:srgbClr val="E8D1A7"/>
+            <a:srgbClr val="93B3A0"/>
           </a:solidFill>
-          <a:ln w="13970">
+          <a:ln w="9525">
             <a:solidFill>
               <a:srgbClr val="5B6B73"/>
             </a:solidFill>
@@ -9237,8 +9266,8 @@
         </p:nvSpPr>
         <p:spPr>
           <a:xfrm>
-            <a:off x="1541221" y="4712208"/>
-            <a:ext cx="1580998" cy="1304544"/>
+            <a:off x="1143000" y="2007108"/>
+            <a:ext cx="1389888" cy="265176"/>
           </a:xfrm>
           <a:prstGeom prst="rect">
             <a:avLst/>
@@ -9247,16 +9276,14 @@
           <a:ln/>
         </p:spPr>
         <p:txBody>
-          <a:bodyPr wrap="square" rtlCol="0" anchor="ctr">
-            <a:normAutofit/>
-          </a:bodyPr>
+          <a:bodyPr wrap="none" lIns="0" tIns="0" rIns="0" bIns="0" rtlCol="0" anchor="ctr"/>
           <a:lstStyle/>
           <a:p>
             <a:pPr algn="ctr" indent="0" marL="0">
               <a:buNone/>
             </a:pPr>
             <a:r>
-              <a:rPr lang="en-US" sz="1000" dirty="0">
+              <a:rPr lang="en-US" sz="800" dirty="0">
                 <a:solidFill>
                   <a:srgbClr val="3A3A3A"/>
                 </a:solidFill>
@@ -9264,9 +9291,9 @@
                 <a:ea typeface="맑은 고딕" pitchFamily="34" charset="-122"/>
                 <a:cs typeface="맑은 고딕" pitchFamily="34" charset="-120"/>
               </a:rPr>
-              <a:t>스타벅스 (30평)</a:t>
+              <a:t>한화생명 150㎡</a:t>
             </a:r>
-            <a:endParaRPr lang="en-US" sz="1000" dirty="0"/>
+            <a:endParaRPr lang="en-US" sz="800" dirty="0"/>
           </a:p>
         </p:txBody>
       </p:sp>
@@ -9278,8 +9305,8 @@
         </p:nvSpPr>
         <p:spPr>
           <a:xfrm>
-            <a:off x="566928" y="3352800"/>
-            <a:ext cx="475488" cy="1341120"/>
+            <a:off x="603504" y="2962656"/>
+            <a:ext cx="232664" cy="329184"/>
           </a:xfrm>
           <a:prstGeom prst="rect">
             <a:avLst/>
@@ -9288,24 +9315,24 @@
           <a:ln/>
         </p:spPr>
         <p:txBody>
-          <a:bodyPr wrap="square" rtlCol="0" anchor="ctr"/>
+          <a:bodyPr wrap="none" lIns="0" tIns="0" rIns="0" bIns="0" rtlCol="0" anchor="ctr"/>
           <a:lstStyle/>
           <a:p>
-            <a:pPr algn="r" indent="0" marL="0">
+            <a:pPr indent="0" marL="0">
               <a:buNone/>
             </a:pPr>
             <a:r>
-              <a:rPr lang="en-US" sz="1200" b="1" dirty="0">
+              <a:rPr lang="en-US" sz="700" dirty="0">
                 <a:solidFill>
-                  <a:srgbClr val="10161F"/>
+                  <a:srgbClr val="5B6B73"/>
                 </a:solidFill>
                 <a:latin typeface="맑은 고딕" pitchFamily="34" charset="0"/>
                 <a:ea typeface="맑은 고딕" pitchFamily="34" charset="-122"/>
                 <a:cs typeface="맑은 고딕" pitchFamily="34" charset="-120"/>
               </a:rPr>
-              <a:t>2F</a:t>
+              <a:t>만기</a:t>
             </a:r>
-            <a:endParaRPr lang="en-US" sz="1200" dirty="0"/>
+            <a:endParaRPr lang="en-US" sz="700" dirty="0"/>
           </a:p>
         </p:txBody>
       </p:sp>
@@ -9317,16 +9344,16 @@
         </p:nvSpPr>
         <p:spPr>
           <a:xfrm>
-            <a:off x="1591056" y="3380232"/>
-            <a:ext cx="1481328" cy="1286256"/>
+            <a:off x="872744" y="3072384"/>
+            <a:ext cx="118872" cy="109728"/>
           </a:xfrm>
           <a:prstGeom prst="rect">
             <a:avLst/>
           </a:prstGeom>
           <a:solidFill>
-            <a:srgbClr val="A6C1D9"/>
+            <a:srgbClr val="93B3A0"/>
           </a:solidFill>
-          <a:ln w="13970">
+          <a:ln w="6350">
             <a:solidFill>
               <a:srgbClr val="5B6B73"/>
             </a:solidFill>
@@ -9342,8 +9369,8 @@
         </p:nvSpPr>
         <p:spPr>
           <a:xfrm>
-            <a:off x="1627632" y="3371088"/>
-            <a:ext cx="1408176" cy="1304544"/>
+            <a:off x="1028192" y="2962656"/>
+            <a:ext cx="250444" cy="329184"/>
           </a:xfrm>
           <a:prstGeom prst="rect">
             <a:avLst/>
@@ -9352,86 +9379,45 @@
           <a:ln/>
         </p:spPr>
         <p:txBody>
-          <a:bodyPr wrap="square" rtlCol="0" anchor="ctr">
-            <a:normAutofit/>
-          </a:bodyPr>
+          <a:bodyPr wrap="none" lIns="0" tIns="0" rIns="0" bIns="0" rtlCol="0" anchor="ctr"/>
           <a:lstStyle/>
           <a:p>
-            <a:pPr algn="ctr" indent="0" marL="0">
+            <a:pPr indent="0" marL="0">
               <a:buNone/>
             </a:pPr>
             <a:r>
-              <a:rPr lang="en-US" sz="1000" dirty="0">
+              <a:rPr lang="en-US" sz="700" dirty="0">
                 <a:solidFill>
-                  <a:srgbClr val="3A3A3A"/>
+                  <a:srgbClr val="5B6B73"/>
                 </a:solidFill>
                 <a:latin typeface="맑은 고딕" pitchFamily="34" charset="0"/>
                 <a:ea typeface="맑은 고딕" pitchFamily="34" charset="-122"/>
                 <a:cs typeface="맑은 고딕" pitchFamily="34" charset="-120"/>
               </a:rPr>
-              <a:t>투썸플레이스 (27평)</a:t>
+              <a:t>2026</a:t>
             </a:r>
-            <a:endParaRPr lang="en-US" sz="1000" dirty="0"/>
+            <a:endParaRPr lang="en-US" sz="700" dirty="0"/>
           </a:p>
         </p:txBody>
       </p:sp>
       <p:sp>
         <p:nvSpPr>
-          <p:cNvPr id="20" name="Text 18"/>
+          <p:cNvPr id="20" name="Shape 18"/>
           <p:cNvSpPr/>
           <p:nvPr/>
         </p:nvSpPr>
         <p:spPr>
           <a:xfrm>
-            <a:off x="566928" y="2011680"/>
-            <a:ext cx="475488" cy="1341120"/>
-          </a:xfrm>
-          <a:prstGeom prst="rect">
-            <a:avLst/>
-          </a:prstGeom>
-          <a:noFill/>
-          <a:ln/>
-        </p:spPr>
-        <p:txBody>
-          <a:bodyPr wrap="square" rtlCol="0" anchor="ctr"/>
-          <a:lstStyle/>
-          <a:p>
-            <a:pPr algn="r" indent="0" marL="0">
-              <a:buNone/>
-            </a:pPr>
-            <a:r>
-              <a:rPr lang="en-US" sz="1200" b="1" dirty="0">
-                <a:solidFill>
-                  <a:srgbClr val="10161F"/>
-                </a:solidFill>
-                <a:latin typeface="맑은 고딕" pitchFamily="34" charset="0"/>
-                <a:ea typeface="맑은 고딕" pitchFamily="34" charset="-122"/>
-                <a:cs typeface="맑은 고딕" pitchFamily="34" charset="-120"/>
-              </a:rPr>
-              <a:t>3F</a:t>
-            </a:r>
-            <a:endParaRPr lang="en-US" sz="1200" dirty="0"/>
-          </a:p>
-        </p:txBody>
-      </p:sp>
-      <p:sp>
-        <p:nvSpPr>
-          <p:cNvPr id="21" name="Shape 19"/>
-          <p:cNvSpPr/>
-          <p:nvPr/>
-        </p:nvSpPr>
-        <p:spPr>
-          <a:xfrm>
-            <a:off x="1097280" y="2039112"/>
-            <a:ext cx="2468880" cy="1286256"/>
+            <a:off x="1315212" y="3072384"/>
+            <a:ext cx="118872" cy="109728"/>
           </a:xfrm>
           <a:prstGeom prst="rect">
             <a:avLst/>
           </a:prstGeom>
           <a:solidFill>
-            <a:srgbClr val="93B3A0"/>
+            <a:srgbClr val="A6C1D9"/>
           </a:solidFill>
-          <a:ln w="13970">
+          <a:ln w="6350">
             <a:solidFill>
               <a:srgbClr val="5B6B73"/>
             </a:solidFill>
@@ -9441,14 +9427,14 @@
       </p:sp>
       <p:sp>
         <p:nvSpPr>
-          <p:cNvPr id="22" name="Text 20"/>
+          <p:cNvPr id="21" name="Text 19"/>
           <p:cNvSpPr/>
           <p:nvPr/>
         </p:nvSpPr>
         <p:spPr>
           <a:xfrm>
-            <a:off x="1133856" y="2029968"/>
-            <a:ext cx="2395728" cy="1304544"/>
+            <a:off x="1470660" y="2962656"/>
+            <a:ext cx="250444" cy="329184"/>
           </a:xfrm>
           <a:prstGeom prst="rect">
             <a:avLst/>
@@ -9457,28 +9443,51 @@
           <a:ln/>
         </p:spPr>
         <p:txBody>
-          <a:bodyPr wrap="square" rtlCol="0" anchor="ctr">
-            <a:normAutofit/>
-          </a:bodyPr>
+          <a:bodyPr wrap="none" lIns="0" tIns="0" rIns="0" bIns="0" rtlCol="0" anchor="ctr"/>
           <a:lstStyle/>
           <a:p>
-            <a:pPr algn="ctr" indent="0" marL="0">
+            <a:pPr indent="0" marL="0">
               <a:buNone/>
             </a:pPr>
             <a:r>
-              <a:rPr lang="en-US" sz="1000" dirty="0">
+              <a:rPr lang="en-US" sz="700" dirty="0">
                 <a:solidFill>
-                  <a:srgbClr val="3A3A3A"/>
+                  <a:srgbClr val="5B6B73"/>
                 </a:solidFill>
                 <a:latin typeface="맑은 고딕" pitchFamily="34" charset="0"/>
                 <a:ea typeface="맑은 고딕" pitchFamily="34" charset="-122"/>
                 <a:cs typeface="맑은 고딕" pitchFamily="34" charset="-120"/>
               </a:rPr>
-              <a:t>한화생명 (45평)</a:t>
+              <a:t>2027</a:t>
             </a:r>
-            <a:endParaRPr lang="en-US" sz="1000" dirty="0"/>
+            <a:endParaRPr lang="en-US" sz="700" dirty="0"/>
           </a:p>
         </p:txBody>
+      </p:sp>
+      <p:sp>
+        <p:nvSpPr>
+          <p:cNvPr id="22" name="Shape 20"/>
+          <p:cNvSpPr/>
+          <p:nvPr/>
+        </p:nvSpPr>
+        <p:spPr>
+          <a:xfrm>
+            <a:off x="1757680" y="3072384"/>
+            <a:ext cx="118872" cy="109728"/>
+          </a:xfrm>
+          <a:prstGeom prst="rect">
+            <a:avLst/>
+          </a:prstGeom>
+          <a:solidFill>
+            <a:srgbClr val="E8D1A7"/>
+          </a:solidFill>
+          <a:ln w="6350">
+            <a:solidFill>
+              <a:srgbClr val="5B6B73"/>
+            </a:solidFill>
+            <a:prstDash val="solid"/>
+          </a:ln>
+        </p:spPr>
       </p:sp>
       <p:sp>
         <p:nvSpPr>
@@ -9488,8 +9497,8 @@
         </p:nvSpPr>
         <p:spPr>
           <a:xfrm>
-            <a:off x="566928" y="5961888"/>
-            <a:ext cx="3108960" cy="182880"/>
+            <a:off x="1913128" y="2962656"/>
+            <a:ext cx="250444" cy="329184"/>
           </a:xfrm>
           <a:prstGeom prst="rect">
             <a:avLst/>
@@ -9498,24 +9507,24 @@
           <a:ln/>
         </p:spPr>
         <p:txBody>
-          <a:bodyPr wrap="square" lIns="0" tIns="0" rIns="0" bIns="0" rtlCol="0" anchor="ctr"/>
+          <a:bodyPr wrap="none" lIns="0" tIns="0" rIns="0" bIns="0" rtlCol="0" anchor="ctr"/>
           <a:lstStyle/>
           <a:p>
-            <a:pPr algn="l" indent="0" marL="0">
+            <a:pPr indent="0" marL="0">
               <a:buNone/>
             </a:pPr>
             <a:r>
-              <a:rPr lang="en-US" sz="850" dirty="0">
+              <a:rPr lang="en-US" sz="700" dirty="0">
                 <a:solidFill>
-                  <a:srgbClr val="8A8A8A"/>
+                  <a:srgbClr val="5B6B73"/>
                 </a:solidFill>
                 <a:latin typeface="맑은 고딕" pitchFamily="34" charset="0"/>
                 <a:ea typeface="맑은 고딕" pitchFamily="34" charset="-122"/>
                 <a:cs typeface="맑은 고딕" pitchFamily="34" charset="-120"/>
               </a:rPr>
-              <a:t>※ 렌트롤 현황 기준 층별 공간 배치도</a:t>
+              <a:t>2030</a:t>
             </a:r>
-            <a:endParaRPr lang="en-US" sz="850" dirty="0"/>
+            <a:endParaRPr lang="en-US" sz="700" dirty="0"/>
           </a:p>
         </p:txBody>
       </p:sp>
@@ -9534,26 +9543,26 @@
           </p:nvPr>
         </p:nvGraphicFramePr>
         <p:xfrm>
-          <a:off x="3950208" y="1645920"/>
-          <a:ext cx="7674559" cy="914400"/>
+          <a:off x="2807208" y="1645920"/>
+          <a:ext cx="8817559" cy="914400"/>
         </p:xfrm>
         <a:graphic>
           <a:graphicData uri="http://schemas.openxmlformats.org/drawingml/2006/table">
             <a:tbl>
               <a:tblPr/>
               <a:tblGrid>
-                <a:gridCol w="438912"/>
-                <a:gridCol w="960120"/>
-                <a:gridCol w="804672"/>
-                <a:gridCol w="713232"/>
-                <a:gridCol w="713232"/>
-                <a:gridCol w="713232"/>
-                <a:gridCol w="713232"/>
-                <a:gridCol w="713232"/>
-                <a:gridCol w="713232"/>
-                <a:gridCol w="1188720"/>
+                <a:gridCol w="621792"/>
+                <a:gridCol w="1316736"/>
+                <a:gridCol w="621792"/>
+                <a:gridCol w="987552"/>
+                <a:gridCol w="987552"/>
+                <a:gridCol w="795528"/>
+                <a:gridCol w="987552"/>
+                <a:gridCol w="795528"/>
+                <a:gridCol w="795528"/>
+                <a:gridCol w="905256"/>
               </a:tblGrid>
-              <a:tr h="320040">
+              <a:tr h="329184">
                 <a:tc>
                   <a:txBody>
                     <a:bodyPr/>
@@ -10165,7 +10174,7 @@
                   </a:tcPr>
                 </a:tc>
               </a:tr>
-              <a:tr h="320040">
+              <a:tr h="329184">
                 <a:tc>
                   <a:txBody>
                     <a:bodyPr/>
@@ -10847,7 +10856,7 @@
                   </a:tcPr>
                 </a:tc>
               </a:tr>
-              <a:tr h="320040">
+              <a:tr h="329184">
                 <a:tc>
                   <a:txBody>
                     <a:bodyPr/>
@@ -11529,7 +11538,7 @@
                   </a:tcPr>
                 </a:tc>
               </a:tr>
-              <a:tr h="320040">
+              <a:tr h="329184">
                 <a:tc>
                   <a:txBody>
                     <a:bodyPr/>
@@ -12211,7 +12220,7 @@
                   </a:tcPr>
                 </a:tc>
               </a:tr>
-              <a:tr h="320040">
+              <a:tr h="329184">
                 <a:tc>
                   <a:txBody>
                     <a:bodyPr/>
@@ -12221,9 +12230,9 @@
                         <a:buNone/>
                       </a:pPr>
                       <a:r>
-                        <a:rPr lang="en-US" sz="850" dirty="0">
-                          <a:solidFill>
-                            <a:srgbClr val="2B2B2B"/>
+                        <a:rPr lang="en-US" sz="850" b="1" dirty="0">
+                          <a:solidFill>
+                            <a:srgbClr val="10161F"/>
                           </a:solidFill>
                           <a:latin typeface="맑은 고딕" pitchFamily="34" charset="0"/>
                           <a:ea typeface="맑은 고딕" pitchFamily="34" charset="-122"/>
@@ -12276,7 +12285,7 @@
                       <a:tailEnd type="none" w="med" len="med"/>
                     </a:lnB>
                     <a:solidFill>
-                      <a:srgbClr val="F3F6F7"/>
+                      <a:srgbClr val="F5F7F9"/>
                     </a:solidFill>
                   </a:tcPr>
                 </a:tc>
@@ -12289,9 +12298,9 @@
                         <a:buNone/>
                       </a:pPr>
                       <a:r>
-                        <a:rPr lang="en-US" sz="850" dirty="0">
-                          <a:solidFill>
-                            <a:srgbClr val="2B2B2B"/>
+                        <a:rPr lang="en-US" sz="850" b="1" dirty="0">
+                          <a:solidFill>
+                            <a:srgbClr val="10161F"/>
                           </a:solidFill>
                           <a:latin typeface="맑은 고딕" pitchFamily="34" charset="0"/>
                           <a:ea typeface="맑은 고딕" pitchFamily="34" charset="-122"/>
@@ -12344,7 +12353,7 @@
                       <a:tailEnd type="none" w="med" len="med"/>
                     </a:lnB>
                     <a:solidFill>
-                      <a:srgbClr val="F3F6F7"/>
+                      <a:srgbClr val="F5F7F9"/>
                     </a:solidFill>
                   </a:tcPr>
                 </a:tc>
@@ -12357,9 +12366,9 @@
                         <a:buNone/>
                       </a:pPr>
                       <a:r>
-                        <a:rPr lang="en-US" sz="850" dirty="0">
-                          <a:solidFill>
-                            <a:srgbClr val="2B2B2B"/>
+                        <a:rPr lang="en-US" sz="850" b="1" dirty="0">
+                          <a:solidFill>
+                            <a:srgbClr val="10161F"/>
                           </a:solidFill>
                           <a:latin typeface="맑은 고딕" pitchFamily="34" charset="0"/>
                           <a:ea typeface="맑은 고딕" pitchFamily="34" charset="-122"/>
@@ -12412,7 +12421,7 @@
                       <a:tailEnd type="none" w="med" len="med"/>
                     </a:lnB>
                     <a:solidFill>
-                      <a:srgbClr val="F3F6F7"/>
+                      <a:srgbClr val="F5F7F9"/>
                     </a:solidFill>
                   </a:tcPr>
                 </a:tc>
@@ -12425,9 +12434,9 @@
                         <a:buNone/>
                       </a:pPr>
                       <a:r>
-                        <a:rPr lang="en-US" sz="850" dirty="0">
-                          <a:solidFill>
-                            <a:srgbClr val="2B2B2B"/>
+                        <a:rPr lang="en-US" sz="850" b="1" dirty="0">
+                          <a:solidFill>
+                            <a:srgbClr val="10161F"/>
                           </a:solidFill>
                           <a:latin typeface="맑은 고딕" pitchFamily="34" charset="0"/>
                           <a:ea typeface="맑은 고딕" pitchFamily="34" charset="-122"/>
@@ -12480,7 +12489,7 @@
                       <a:tailEnd type="none" w="med" len="med"/>
                     </a:lnB>
                     <a:solidFill>
-                      <a:srgbClr val="F3F6F7"/>
+                      <a:srgbClr val="F5F7F9"/>
                     </a:solidFill>
                   </a:tcPr>
                 </a:tc>
@@ -12493,9 +12502,9 @@
                         <a:buNone/>
                       </a:pPr>
                       <a:r>
-                        <a:rPr lang="en-US" sz="850" dirty="0">
-                          <a:solidFill>
-                            <a:srgbClr val="2B2B2B"/>
+                        <a:rPr lang="en-US" sz="850" b="1" dirty="0">
+                          <a:solidFill>
+                            <a:srgbClr val="10161F"/>
                           </a:solidFill>
                           <a:latin typeface="맑은 고딕" pitchFamily="34" charset="0"/>
                           <a:ea typeface="맑은 고딕" pitchFamily="34" charset="-122"/>
@@ -12548,7 +12557,7 @@
                       <a:tailEnd type="none" w="med" len="med"/>
                     </a:lnB>
                     <a:solidFill>
-                      <a:srgbClr val="F3F6F7"/>
+                      <a:srgbClr val="F5F7F9"/>
                     </a:solidFill>
                   </a:tcPr>
                 </a:tc>
@@ -12561,9 +12570,9 @@
                         <a:buNone/>
                       </a:pPr>
                       <a:r>
-                        <a:rPr lang="en-US" sz="850" dirty="0">
-                          <a:solidFill>
-                            <a:srgbClr val="2B2B2B"/>
+                        <a:rPr lang="en-US" sz="850" b="1" dirty="0">
+                          <a:solidFill>
+                            <a:srgbClr val="10161F"/>
                           </a:solidFill>
                           <a:latin typeface="맑은 고딕" pitchFamily="34" charset="0"/>
                           <a:ea typeface="맑은 고딕" pitchFamily="34" charset="-122"/>
@@ -12616,7 +12625,7 @@
                       <a:tailEnd type="none" w="med" len="med"/>
                     </a:lnB>
                     <a:solidFill>
-                      <a:srgbClr val="F3F6F7"/>
+                      <a:srgbClr val="F5F7F9"/>
                     </a:solidFill>
                   </a:tcPr>
                 </a:tc>
@@ -12629,9 +12638,9 @@
                         <a:buNone/>
                       </a:pPr>
                       <a:r>
-                        <a:rPr lang="en-US" sz="850" dirty="0">
-                          <a:solidFill>
-                            <a:srgbClr val="2B2B2B"/>
+                        <a:rPr lang="en-US" sz="850" b="1" dirty="0">
+                          <a:solidFill>
+                            <a:srgbClr val="10161F"/>
                           </a:solidFill>
                           <a:latin typeface="맑은 고딕" pitchFamily="34" charset="0"/>
                           <a:ea typeface="맑은 고딕" pitchFamily="34" charset="-122"/>
@@ -12684,7 +12693,7 @@
                       <a:tailEnd type="none" w="med" len="med"/>
                     </a:lnB>
                     <a:solidFill>
-                      <a:srgbClr val="F3F6F7"/>
+                      <a:srgbClr val="F5F7F9"/>
                     </a:solidFill>
                   </a:tcPr>
                 </a:tc>
@@ -12697,9 +12706,9 @@
                         <a:buNone/>
                       </a:pPr>
                       <a:r>
-                        <a:rPr lang="en-US" sz="850" dirty="0">
-                          <a:solidFill>
-                            <a:srgbClr val="2B2B2B"/>
+                        <a:rPr lang="en-US" sz="850" b="1" dirty="0">
+                          <a:solidFill>
+                            <a:srgbClr val="10161F"/>
                           </a:solidFill>
                           <a:latin typeface="맑은 고딕" pitchFamily="34" charset="0"/>
                           <a:ea typeface="맑은 고딕" pitchFamily="34" charset="-122"/>
@@ -12752,7 +12761,7 @@
                       <a:tailEnd type="none" w="med" len="med"/>
                     </a:lnB>
                     <a:solidFill>
-                      <a:srgbClr val="F3F6F7"/>
+                      <a:srgbClr val="F5F7F9"/>
                     </a:solidFill>
                   </a:tcPr>
                 </a:tc>
@@ -12765,9 +12774,9 @@
                         <a:buNone/>
                       </a:pPr>
                       <a:r>
-                        <a:rPr lang="en-US" sz="850" dirty="0">
-                          <a:solidFill>
-                            <a:srgbClr val="2B2B2B"/>
+                        <a:rPr lang="en-US" sz="850" b="1" dirty="0">
+                          <a:solidFill>
+                            <a:srgbClr val="10161F"/>
                           </a:solidFill>
                           <a:latin typeface="맑은 고딕" pitchFamily="34" charset="0"/>
                           <a:ea typeface="맑은 고딕" pitchFamily="34" charset="-122"/>
@@ -12820,7 +12829,7 @@
                       <a:tailEnd type="none" w="med" len="med"/>
                     </a:lnB>
                     <a:solidFill>
-                      <a:srgbClr val="F3F6F7"/>
+                      <a:srgbClr val="F5F7F9"/>
                     </a:solidFill>
                   </a:tcPr>
                 </a:tc>
@@ -12833,9 +12842,9 @@
                         <a:buNone/>
                       </a:pPr>
                       <a:r>
-                        <a:rPr lang="en-US" sz="850" dirty="0">
-                          <a:solidFill>
-                            <a:srgbClr val="2B2B2B"/>
+                        <a:rPr lang="en-US" sz="850" b="1" dirty="0">
+                          <a:solidFill>
+                            <a:srgbClr val="10161F"/>
                           </a:solidFill>
                           <a:latin typeface="맑은 고딕" pitchFamily="34" charset="0"/>
                           <a:ea typeface="맑은 고딕" pitchFamily="34" charset="-122"/>
@@ -12888,7 +12897,7 @@
                       <a:tailEnd type="none" w="med" len="med"/>
                     </a:lnB>
                     <a:solidFill>
-                      <a:srgbClr val="F3F6F7"/>
+                      <a:srgbClr val="F5F7F9"/>
                     </a:solidFill>
                   </a:tcPr>
                 </a:tc>
@@ -13154,12 +13163,12 @@
         </p:nvSpPr>
         <p:spPr>
           <a:xfrm>
-            <a:off x="566928" y="1371600"/>
-            <a:ext cx="5120640" cy="3840480"/>
+            <a:off x="566928" y="1325880"/>
+            <a:ext cx="5120640" cy="3822192"/>
           </a:xfrm>
           <a:prstGeom prst="roundRect">
             <a:avLst>
-              <a:gd name="adj" fmla="val 1905"/>
+              <a:gd name="adj" fmla="val 1914"/>
             </a:avLst>
           </a:prstGeom>
           <a:solidFill>
@@ -13181,12 +13190,12 @@
         </p:nvSpPr>
         <p:spPr>
           <a:xfrm>
-            <a:off x="795528" y="1600200"/>
-            <a:ext cx="4663440" cy="1005840"/>
+            <a:off x="795528" y="1508760"/>
+            <a:ext cx="4663440" cy="566928"/>
           </a:xfrm>
           <a:prstGeom prst="roundRect">
             <a:avLst>
-              <a:gd name="adj" fmla="val 7273"/>
+              <a:gd name="adj" fmla="val 12903"/>
             </a:avLst>
           </a:prstGeom>
           <a:solidFill>
@@ -13203,8 +13212,8 @@
         </p:nvSpPr>
         <p:spPr>
           <a:xfrm>
-            <a:off x="1024128" y="1600200"/>
-            <a:ext cx="2286000" cy="1005840"/>
+            <a:off x="978408" y="1581912"/>
+            <a:ext cx="2880360" cy="420624"/>
           </a:xfrm>
           <a:prstGeom prst="rect">
             <a:avLst/>
@@ -13213,14 +13222,16 @@
           <a:ln/>
         </p:spPr>
         <p:txBody>
-          <a:bodyPr wrap="square" rtlCol="0" anchor="ctr"/>
+          <a:bodyPr wrap="square" lIns="0" tIns="0" rIns="0" bIns="0" rtlCol="0" anchor="ctr">
+            <a:normAutofit/>
+          </a:bodyPr>
           <a:lstStyle/>
           <a:p>
             <a:pPr indent="0" marL="0">
               <a:buNone/>
             </a:pPr>
             <a:r>
-              <a:rPr lang="en-US" sz="1600" b="1" dirty="0">
+              <a:rPr lang="en-US" sz="1050" b="1" dirty="0">
                 <a:solidFill>
                   <a:srgbClr val="FFFFFF"/>
                 </a:solidFill>
@@ -13228,9 +13239,9 @@
                 <a:ea typeface="맑은 고딕" pitchFamily="34" charset="-122"/>
                 <a:cs typeface="맑은 고딕" pitchFamily="34" charset="-120"/>
               </a:rPr>
-              <a:t>수익률</a:t>
+              <a:t>임대수익률 (Gross, 매매가−보증금 대비)</a:t>
             </a:r>
-            <a:endParaRPr lang="en-US" sz="1600" dirty="0"/>
+            <a:endParaRPr lang="en-US" sz="1050" dirty="0"/>
           </a:p>
         </p:txBody>
       </p:sp>
@@ -13242,8 +13253,8 @@
         </p:nvSpPr>
         <p:spPr>
           <a:xfrm>
-            <a:off x="2487168" y="1600200"/>
-            <a:ext cx="2743200" cy="1005840"/>
+            <a:off x="3904488" y="1581912"/>
+            <a:ext cx="1417320" cy="420624"/>
           </a:xfrm>
           <a:prstGeom prst="rect">
             <a:avLst/>
@@ -13252,14 +13263,14 @@
           <a:ln/>
         </p:spPr>
         <p:txBody>
-          <a:bodyPr wrap="square" rtlCol="0" anchor="ctr"/>
+          <a:bodyPr wrap="square" lIns="0" tIns="0" rIns="0" bIns="0" rtlCol="0" anchor="ctr"/>
           <a:lstStyle/>
           <a:p>
             <a:pPr algn="r" indent="0" marL="0">
               <a:buNone/>
             </a:pPr>
             <a:r>
-              <a:rPr lang="en-US" sz="2800" b="1" dirty="0">
+              <a:rPr lang="en-US" sz="2400" b="1" dirty="0">
                 <a:solidFill>
                   <a:srgbClr val="B98A2E"/>
                 </a:solidFill>
@@ -13269,7 +13280,7 @@
               </a:rPr>
               <a:t>0.00%</a:t>
             </a:r>
-            <a:endParaRPr lang="en-US" sz="2800" dirty="0"/>
+            <a:endParaRPr lang="en-US" sz="2400" dirty="0"/>
           </a:p>
         </p:txBody>
       </p:sp>
@@ -13281,7 +13292,7 @@
         </p:nvSpPr>
         <p:spPr>
           <a:xfrm>
-            <a:off x="886968" y="2834640"/>
+            <a:off x="886968" y="2185416"/>
             <a:ext cx="2743200" cy="347472"/>
           </a:xfrm>
           <a:prstGeom prst="rect">
@@ -13320,7 +13331,7 @@
         </p:nvSpPr>
         <p:spPr>
           <a:xfrm>
-            <a:off x="3127248" y="2834640"/>
+            <a:off x="3127248" y="2185416"/>
             <a:ext cx="2194560" cy="347472"/>
           </a:xfrm>
           <a:prstGeom prst="rect">
@@ -13359,7 +13370,7 @@
         </p:nvSpPr>
         <p:spPr>
           <a:xfrm>
-            <a:off x="795528" y="3182112"/>
+            <a:off x="795528" y="2532888"/>
             <a:ext cx="4663440" cy="0"/>
           </a:xfrm>
           <a:prstGeom prst="line">
@@ -13382,7 +13393,7 @@
         </p:nvSpPr>
         <p:spPr>
           <a:xfrm>
-            <a:off x="886968" y="3182112"/>
+            <a:off x="886968" y="2532888"/>
             <a:ext cx="2743200" cy="347472"/>
           </a:xfrm>
           <a:prstGeom prst="rect">
@@ -13421,7 +13432,7 @@
         </p:nvSpPr>
         <p:spPr>
           <a:xfrm>
-            <a:off x="3127248" y="3182112"/>
+            <a:off x="3127248" y="2532888"/>
             <a:ext cx="2194560" cy="347472"/>
           </a:xfrm>
           <a:prstGeom prst="rect">
@@ -13460,7 +13471,7 @@
         </p:nvSpPr>
         <p:spPr>
           <a:xfrm>
-            <a:off x="795528" y="3529584"/>
+            <a:off x="795528" y="2880360"/>
             <a:ext cx="4663440" cy="0"/>
           </a:xfrm>
           <a:prstGeom prst="line">
@@ -13483,7 +13494,7 @@
         </p:nvSpPr>
         <p:spPr>
           <a:xfrm>
-            <a:off x="886968" y="3529584"/>
+            <a:off x="886968" y="2880360"/>
             <a:ext cx="2743200" cy="347472"/>
           </a:xfrm>
           <a:prstGeom prst="rect">
@@ -13522,7 +13533,7 @@
         </p:nvSpPr>
         <p:spPr>
           <a:xfrm>
-            <a:off x="3127248" y="3529584"/>
+            <a:off x="3127248" y="2880360"/>
             <a:ext cx="2194560" cy="347472"/>
           </a:xfrm>
           <a:prstGeom prst="rect">
@@ -13561,7 +13572,7 @@
         </p:nvSpPr>
         <p:spPr>
           <a:xfrm>
-            <a:off x="795528" y="3877056"/>
+            <a:off x="795528" y="3227832"/>
             <a:ext cx="4663440" cy="0"/>
           </a:xfrm>
           <a:prstGeom prst="line">
@@ -13584,7 +13595,7 @@
         </p:nvSpPr>
         <p:spPr>
           <a:xfrm>
-            <a:off x="886968" y="3877056"/>
+            <a:off x="886968" y="3227832"/>
             <a:ext cx="2743200" cy="347472"/>
           </a:xfrm>
           <a:prstGeom prst="rect">
@@ -13609,7 +13620,7 @@
                 <a:ea typeface="맑은 고딕" pitchFamily="34" charset="-122"/>
                 <a:cs typeface="맑은 고딕" pitchFamily="34" charset="-120"/>
               </a:rPr>
-              <a:t>순투자금 (매매가 − 보증금)</a:t>
+              <a:t>보증금 차감 매입가 (매매가−보증금)</a:t>
             </a:r>
             <a:endParaRPr lang="en-US" sz="1100" dirty="0"/>
           </a:p>
@@ -13623,7 +13634,7 @@
         </p:nvSpPr>
         <p:spPr>
           <a:xfrm>
-            <a:off x="3127248" y="3877056"/>
+            <a:off x="3127248" y="3227832"/>
             <a:ext cx="2194560" cy="347472"/>
           </a:xfrm>
           <a:prstGeom prst="rect">
@@ -13662,7 +13673,7 @@
         </p:nvSpPr>
         <p:spPr>
           <a:xfrm>
-            <a:off x="795528" y="4224528"/>
+            <a:off x="795528" y="3575304"/>
             <a:ext cx="4663440" cy="0"/>
           </a:xfrm>
           <a:prstGeom prst="line">
@@ -13685,12 +13696,12 @@
         </p:nvSpPr>
         <p:spPr>
           <a:xfrm>
-            <a:off x="6053328" y="1371600"/>
-            <a:ext cx="5571439" cy="3840480"/>
+            <a:off x="6053328" y="1325880"/>
+            <a:ext cx="5571439" cy="3822192"/>
           </a:xfrm>
           <a:prstGeom prst="roundRect">
             <a:avLst>
-              <a:gd name="adj" fmla="val 1905"/>
+              <a:gd name="adj" fmla="val 1914"/>
             </a:avLst>
           </a:prstGeom>
           <a:solidFill>
@@ -13712,7 +13723,7 @@
         </p:nvSpPr>
         <p:spPr>
           <a:xfrm>
-            <a:off x="6236208" y="1508760"/>
+            <a:off x="6236208" y="1463040"/>
             <a:ext cx="5205679" cy="320040"/>
           </a:xfrm>
           <a:prstGeom prst="rect">
@@ -13751,7 +13762,7 @@
         </p:nvSpPr>
         <p:spPr>
           <a:xfrm>
-            <a:off x="6190488" y="1920240"/>
+            <a:off x="6190488" y="1874520"/>
             <a:ext cx="502920" cy="292608"/>
           </a:xfrm>
           <a:prstGeom prst="rect">
@@ -13790,7 +13801,7 @@
         </p:nvSpPr>
         <p:spPr>
           <a:xfrm>
-            <a:off x="6784848" y="1956816"/>
+            <a:off x="6784848" y="1911096"/>
             <a:ext cx="2272187" cy="219456"/>
           </a:xfrm>
           <a:prstGeom prst="rect">
@@ -13810,7 +13821,7 @@
         </p:nvSpPr>
         <p:spPr>
           <a:xfrm>
-            <a:off x="9102755" y="1920240"/>
+            <a:off x="9102755" y="1874520"/>
             <a:ext cx="1097280" cy="292608"/>
           </a:xfrm>
           <a:prstGeom prst="rect">
@@ -13849,7 +13860,7 @@
         </p:nvSpPr>
         <p:spPr>
           <a:xfrm>
-            <a:off x="6190488" y="2212848"/>
+            <a:off x="6190488" y="2167128"/>
             <a:ext cx="502920" cy="292608"/>
           </a:xfrm>
           <a:prstGeom prst="rect">
@@ -13888,7 +13899,7 @@
         </p:nvSpPr>
         <p:spPr>
           <a:xfrm>
-            <a:off x="6784848" y="2249424"/>
+            <a:off x="6784848" y="2203704"/>
             <a:ext cx="2605441" cy="219456"/>
           </a:xfrm>
           <a:prstGeom prst="rect">
@@ -13908,7 +13919,7 @@
         </p:nvSpPr>
         <p:spPr>
           <a:xfrm>
-            <a:off x="9436009" y="2212848"/>
+            <a:off x="9436009" y="2167128"/>
             <a:ext cx="1097280" cy="292608"/>
           </a:xfrm>
           <a:prstGeom prst="rect">
@@ -13947,7 +13958,7 @@
         </p:nvSpPr>
         <p:spPr>
           <a:xfrm>
-            <a:off x="6190488" y="2505456"/>
+            <a:off x="6190488" y="2459736"/>
             <a:ext cx="502920" cy="292608"/>
           </a:xfrm>
           <a:prstGeom prst="rect">
@@ -13986,7 +13997,7 @@
         </p:nvSpPr>
         <p:spPr>
           <a:xfrm>
-            <a:off x="6784848" y="2542032"/>
+            <a:off x="6784848" y="2496312"/>
             <a:ext cx="2953843" cy="219456"/>
           </a:xfrm>
           <a:prstGeom prst="rect">
@@ -14006,7 +14017,7 @@
         </p:nvSpPr>
         <p:spPr>
           <a:xfrm>
-            <a:off x="9784411" y="2505456"/>
+            <a:off x="9784411" y="2459736"/>
             <a:ext cx="1097280" cy="292608"/>
           </a:xfrm>
           <a:prstGeom prst="rect">
@@ -14045,7 +14056,7 @@
         </p:nvSpPr>
         <p:spPr>
           <a:xfrm>
-            <a:off x="6190488" y="2798064"/>
+            <a:off x="6190488" y="2752344"/>
             <a:ext cx="502920" cy="292608"/>
           </a:xfrm>
           <a:prstGeom prst="rect">
@@ -14084,7 +14095,7 @@
         </p:nvSpPr>
         <p:spPr>
           <a:xfrm>
-            <a:off x="6784848" y="2834640"/>
+            <a:off x="6784848" y="2788920"/>
             <a:ext cx="3181061" cy="219456"/>
           </a:xfrm>
           <a:prstGeom prst="rect">
@@ -14104,7 +14115,7 @@
         </p:nvSpPr>
         <p:spPr>
           <a:xfrm>
-            <a:off x="10011629" y="2798064"/>
+            <a:off x="10011629" y="2752344"/>
             <a:ext cx="1097280" cy="292608"/>
           </a:xfrm>
           <a:prstGeom prst="rect">
@@ -14143,7 +14154,7 @@
         </p:nvSpPr>
         <p:spPr>
           <a:xfrm>
-            <a:off x="6190488" y="3090672"/>
+            <a:off x="6190488" y="3044952"/>
             <a:ext cx="502920" cy="292608"/>
           </a:xfrm>
           <a:prstGeom prst="rect">
@@ -14182,7 +14193,7 @@
         </p:nvSpPr>
         <p:spPr>
           <a:xfrm>
-            <a:off x="6784848" y="3127248"/>
+            <a:off x="6784848" y="3081528"/>
             <a:ext cx="3559759" cy="219456"/>
           </a:xfrm>
           <a:prstGeom prst="rect">
@@ -14202,7 +14213,7 @@
         </p:nvSpPr>
         <p:spPr>
           <a:xfrm>
-            <a:off x="10390327" y="3090672"/>
+            <a:off x="10390327" y="3044952"/>
             <a:ext cx="1097280" cy="292608"/>
           </a:xfrm>
           <a:prstGeom prst="rect">
@@ -14241,7 +14252,7 @@
         </p:nvSpPr>
         <p:spPr>
           <a:xfrm>
-            <a:off x="6236208" y="3520440"/>
+            <a:off x="6236208" y="3474720"/>
             <a:ext cx="5205679" cy="320040"/>
           </a:xfrm>
           <a:prstGeom prst="rect">
@@ -14294,7 +14305,7 @@
         </p:nvSpPr>
         <p:spPr>
           <a:xfrm>
-            <a:off x="6236208" y="3840480"/>
+            <a:off x="6236208" y="3794760"/>
             <a:ext cx="5205679" cy="274320"/>
           </a:xfrm>
           <a:prstGeom prst="rect">
@@ -14347,7 +14358,7 @@
         </p:nvSpPr>
         <p:spPr>
           <a:xfrm>
-            <a:off x="6190488" y="4892040"/>
+            <a:off x="6190488" y="4828032"/>
             <a:ext cx="5297119" cy="228600"/>
           </a:xfrm>
           <a:prstGeom prst="rect">
@@ -14386,12 +14397,12 @@
         </p:nvSpPr>
         <p:spPr>
           <a:xfrm>
-            <a:off x="566928" y="5349240"/>
-            <a:ext cx="11057839" cy="438912"/>
+            <a:off x="566928" y="5285232"/>
+            <a:ext cx="11057839" cy="612648"/>
           </a:xfrm>
           <a:prstGeom prst="roundRect">
             <a:avLst>
-              <a:gd name="adj" fmla="val 12500"/>
+              <a:gd name="adj" fmla="val 8955"/>
             </a:avLst>
           </a:prstGeom>
           <a:solidFill>
@@ -14408,8 +14419,8 @@
         </p:nvSpPr>
         <p:spPr>
           <a:xfrm>
-            <a:off x="566928" y="5404104"/>
-            <a:ext cx="36576" cy="329184"/>
+            <a:off x="566928" y="5340096"/>
+            <a:ext cx="36576" cy="502920"/>
           </a:xfrm>
           <a:prstGeom prst="rect">
             <a:avLst/>
@@ -14428,7 +14439,7 @@
         </p:nvSpPr>
         <p:spPr>
           <a:xfrm>
-            <a:off x="713232" y="5440680"/>
+            <a:off x="713232" y="5376672"/>
             <a:ext cx="10801807" cy="201168"/>
           </a:xfrm>
           <a:prstGeom prst="rect">
@@ -14453,7 +14464,7 @@
                 <a:ea typeface="맑은 고딕" pitchFamily="34" charset="-122"/>
                 <a:cs typeface="맑은 고딕" pitchFamily="34" charset="-120"/>
               </a:rPr>
-              <a:t>투자 판단 참고</a:t>
+              <a:t>수익률 산출 요약</a:t>
             </a:r>
             <a:endParaRPr lang="en-US" sz="1050" dirty="0"/>
           </a:p>
@@ -14467,8 +14478,8 @@
         </p:nvSpPr>
         <p:spPr>
           <a:xfrm>
-            <a:off x="713232" y="5641848"/>
-            <a:ext cx="10801807" cy="109728"/>
+            <a:off x="713232" y="5577840"/>
+            <a:ext cx="10801807" cy="283464"/>
           </a:xfrm>
           <a:prstGeom prst="rect">
             <a:avLst/>
@@ -14496,7 +14507,7 @@
                 <a:ea typeface="맑은 고딕" pitchFamily="34" charset="-122"/>
                 <a:cs typeface="맑은 고딕" pitchFamily="34" charset="-120"/>
               </a:rPr>
-              <a:t>5년간 공시지가 연평균 11.9% 상승 → 토지가치 보존력 확인</a:t>
+              <a:t>5년간 개별공시지가 연평균 11.9% 상승</a:t>
             </a:r>
             <a:endParaRPr lang="en-US" sz="980" dirty="0"/>
           </a:p>
@@ -14505,6 +14516,47 @@
       <p:sp>
         <p:nvSpPr>
           <p:cNvPr id="46" name="Text 44"/>
+          <p:cNvSpPr/>
+          <p:nvPr/>
+        </p:nvSpPr>
+        <p:spPr>
+          <a:xfrm>
+            <a:off x="566928" y="5952744"/>
+            <a:ext cx="11057839" cy="219456"/>
+          </a:xfrm>
+          <a:prstGeom prst="rect">
+            <a:avLst/>
+          </a:prstGeom>
+          <a:noFill/>
+          <a:ln/>
+        </p:spPr>
+        <p:txBody>
+          <a:bodyPr wrap="square" lIns="0" tIns="0" rIns="0" bIns="0" rtlCol="0" anchor="ctr">
+            <a:normAutofit/>
+          </a:bodyPr>
+          <a:lstStyle/>
+          <a:p>
+            <a:pPr indent="0" marL="0">
+              <a:buNone/>
+            </a:pPr>
+            <a:r>
+              <a:rPr lang="en-US" sz="800" dirty="0">
+                <a:solidFill>
+                  <a:srgbClr val="8A8A8A"/>
+                </a:solidFill>
+                <a:latin typeface="맑은 고딕" pitchFamily="34" charset="0"/>
+                <a:ea typeface="맑은 고딕" pitchFamily="34" charset="-122"/>
+                <a:cs typeface="맑은 고딕" pitchFamily="34" charset="-120"/>
+              </a:rPr>
+              <a:t>※ 임대수익률은 운영비 차감 전 기준, 보증금 승계 가정.</a:t>
+            </a:r>
+            <a:endParaRPr lang="en-US" sz="800" dirty="0"/>
+          </a:p>
+        </p:txBody>
+      </p:sp>
+      <p:sp>
+        <p:nvSpPr>
+          <p:cNvPr id="47" name="Text 45"/>
           <p:cNvSpPr/>
           <p:nvPr/>
         </p:nvSpPr>
@@ -14543,7 +14595,7 @@
       </p:sp>
       <p:sp>
         <p:nvSpPr>
-          <p:cNvPr id="47" name="Text 45"/>
+          <p:cNvPr id="48" name="Text 46"/>
           <p:cNvSpPr/>
           <p:nvPr/>
         </p:nvSpPr>
